--- a/docs/presentation/finalppt.pptx
+++ b/docs/presentation/finalppt.pptx
@@ -6650,7 +6650,7 @@
           <a:lstStyle/>
           <a:p>
             <a:r>
-              <a:rPr lang="en-US" sz="2800" dirty="0" smtClean="0">
+              <a:rPr lang="en-US" sz="2000" dirty="0" smtClean="0">
                 <a:latin typeface="Times New Roman" pitchFamily="18" charset="0"/>
                 <a:cs typeface="Times New Roman" pitchFamily="18" charset="0"/>
               </a:rPr>
@@ -6677,7 +6677,7 @@
           <a:lstStyle/>
           <a:p>
             <a:r>
-              <a:rPr lang="en-US" sz="2800" dirty="0" smtClean="0">
+              <a:rPr lang="en-US" sz="2000" dirty="0" smtClean="0">
                 <a:latin typeface="Times New Roman" pitchFamily="18" charset="0"/>
                 <a:cs typeface="Times New Roman" pitchFamily="18" charset="0"/>
               </a:rPr>
@@ -6686,7 +6686,7 @@
           </a:p>
           <a:p>
             <a:r>
-              <a:rPr lang="en-US" sz="2800" dirty="0" smtClean="0">
+              <a:rPr lang="en-US" sz="2000" dirty="0" smtClean="0">
                 <a:latin typeface="Times New Roman" pitchFamily="18" charset="0"/>
                 <a:cs typeface="Times New Roman" pitchFamily="18" charset="0"/>
               </a:rPr>
@@ -6695,7 +6695,7 @@
           </a:p>
           <a:p>
             <a:r>
-              <a:rPr lang="en-US" sz="2800" dirty="0" smtClean="0">
+              <a:rPr lang="en-US" sz="2000" dirty="0" smtClean="0">
                 <a:latin typeface="Times New Roman" pitchFamily="18" charset="0"/>
                 <a:cs typeface="Times New Roman" pitchFamily="18" charset="0"/>
               </a:rPr>
@@ -6704,7 +6704,7 @@
           </a:p>
           <a:p>
             <a:r>
-              <a:rPr lang="en-US" sz="2800" dirty="0" smtClean="0">
+              <a:rPr lang="en-US" sz="2000" dirty="0" smtClean="0">
                 <a:latin typeface="Times New Roman" pitchFamily="18" charset="0"/>
                 <a:cs typeface="Times New Roman" pitchFamily="18" charset="0"/>
               </a:rPr>
@@ -6713,13 +6713,13 @@
           </a:p>
           <a:p>
             <a:r>
-              <a:rPr lang="en-US" sz="2800" dirty="0" smtClean="0">
+              <a:rPr lang="en-US" sz="2000" dirty="0" smtClean="0">
                 <a:latin typeface="Times New Roman" pitchFamily="18" charset="0"/>
                 <a:cs typeface="Times New Roman" pitchFamily="18" charset="0"/>
               </a:rPr>
               <a:t>Generic administration.</a:t>
             </a:r>
-            <a:endParaRPr lang="en-US" sz="2800" dirty="0">
+            <a:endParaRPr lang="en-US" sz="2000" dirty="0">
               <a:latin typeface="Times New Roman" pitchFamily="18" charset="0"/>
               <a:cs typeface="Times New Roman" pitchFamily="18" charset="0"/>
             </a:endParaRPr>
@@ -6749,27 +6749,27 @@
           <a:lstStyle/>
           <a:p>
             <a:r>
-              <a:rPr lang="en-US" sz="2800" dirty="0" smtClean="0">
+              <a:rPr lang="en-US" sz="2000" dirty="0" smtClean="0">
                 <a:latin typeface="Times New Roman" pitchFamily="18" charset="0"/>
                 <a:cs typeface="Times New Roman" pitchFamily="18" charset="0"/>
               </a:rPr>
               <a:t>SRMS </a:t>
             </a:r>
             <a:r>
-              <a:rPr lang="en-US" sz="2800" dirty="0" err="1" smtClean="0">
+              <a:rPr lang="en-US" sz="2000" dirty="0" err="1" smtClean="0">
                 <a:latin typeface="Times New Roman" pitchFamily="18" charset="0"/>
                 <a:cs typeface="Times New Roman" pitchFamily="18" charset="0"/>
               </a:rPr>
               <a:t>Drona</a:t>
             </a:r>
             <a:r>
-              <a:rPr lang="en-US" sz="2800" dirty="0" smtClean="0">
+              <a:rPr lang="en-US" sz="2000" dirty="0" smtClean="0">
                 <a:latin typeface="Times New Roman" pitchFamily="18" charset="0"/>
                 <a:cs typeface="Times New Roman" pitchFamily="18" charset="0"/>
               </a:rPr>
               <a:t>:</a:t>
             </a:r>
-            <a:endParaRPr lang="en-US" sz="2800" dirty="0">
+            <a:endParaRPr lang="en-US" sz="2000" dirty="0">
               <a:latin typeface="Times New Roman" pitchFamily="18" charset="0"/>
               <a:cs typeface="Times New Roman" pitchFamily="18" charset="0"/>
             </a:endParaRPr>
@@ -6794,7 +6794,7 @@
           <a:lstStyle/>
           <a:p>
             <a:r>
-              <a:rPr lang="en-US" sz="2800" dirty="0" smtClean="0">
+              <a:rPr lang="en-US" sz="2000" dirty="0" smtClean="0">
                 <a:latin typeface="Times New Roman" pitchFamily="18" charset="0"/>
                 <a:cs typeface="Times New Roman" pitchFamily="18" charset="0"/>
               </a:rPr>
@@ -6803,7 +6803,7 @@
           </a:p>
           <a:p>
             <a:r>
-              <a:rPr lang="en-US" sz="2800" dirty="0" smtClean="0">
+              <a:rPr lang="en-US" sz="2000" dirty="0" smtClean="0">
                 <a:latin typeface="Times New Roman" pitchFamily="18" charset="0"/>
                 <a:cs typeface="Times New Roman" pitchFamily="18" charset="0"/>
               </a:rPr>
@@ -6812,7 +6812,7 @@
           </a:p>
           <a:p>
             <a:r>
-              <a:rPr lang="en-US" sz="2800" dirty="0" smtClean="0">
+              <a:rPr lang="en-US" sz="2000" dirty="0" smtClean="0">
                 <a:latin typeface="Times New Roman" pitchFamily="18" charset="0"/>
                 <a:cs typeface="Times New Roman" pitchFamily="18" charset="0"/>
               </a:rPr>
@@ -6821,7 +6821,7 @@
           </a:p>
           <a:p>
             <a:r>
-              <a:rPr lang="en-US" sz="2800" dirty="0" smtClean="0">
+              <a:rPr lang="en-US" sz="2000" dirty="0" smtClean="0">
                 <a:latin typeface="Times New Roman" pitchFamily="18" charset="0"/>
                 <a:cs typeface="Times New Roman" pitchFamily="18" charset="0"/>
               </a:rPr>
@@ -6830,16 +6830,128 @@
           </a:p>
           <a:p>
             <a:r>
-              <a:rPr lang="en-US" sz="2800" dirty="0" smtClean="0">
+              <a:rPr lang="en-US" sz="2000" dirty="0" smtClean="0">
                 <a:latin typeface="Times New Roman" pitchFamily="18" charset="0"/>
                 <a:cs typeface="Times New Roman" pitchFamily="18" charset="0"/>
               </a:rPr>
               <a:t>Role based administration.</a:t>
             </a:r>
-            <a:endParaRPr lang="en-US" sz="2800" dirty="0">
+            <a:endParaRPr lang="en-US" sz="2000" dirty="0">
               <a:latin typeface="Times New Roman" pitchFamily="18" charset="0"/>
               <a:cs typeface="Times New Roman" pitchFamily="18" charset="0"/>
             </a:endParaRPr>
+          </a:p>
+        </p:txBody>
+      </p:sp>
+      <p:pic>
+        <p:nvPicPr>
+          <p:cNvPr id="7" name="Screenshot English"/>
+          <p:cNvPicPr>
+            <a:picLocks noChangeAspect="1"/>
+          </p:cNvPicPr>
+          <p:nvPr/>
+        </p:nvPicPr>
+        <p:blipFill rotWithShape="1">
+          <a:blip r:embed="rId2"/>
+          <a:stretch>
+            <a:fillRect/>
+          </a:stretch>
+        </p:blipFill>
+        <p:spPr>
+          <a:xfrm>
+            <a:off x="1600000" y="4180000"/>
+            <a:ext cx="4100000" cy="2306000"/>
+          </a:xfrm>
+          <a:prstGeom prst="rect">
+            <a:avLst/>
+          </a:prstGeom>
+        </p:spPr>
+      </p:pic>
+      <p:pic>
+        <p:nvPicPr>
+          <p:cNvPr id="8" name="Screenshot Hindi"/>
+          <p:cNvPicPr>
+            <a:picLocks noChangeAspect="1"/>
+          </p:cNvPicPr>
+          <p:nvPr/>
+        </p:nvPicPr>
+        <p:blipFill rotWithShape="1">
+          <a:blip r:embed="rId3"/>
+          <a:stretch>
+            <a:fillRect/>
+          </a:stretch>
+        </p:blipFill>
+        <p:spPr>
+          <a:xfrm>
+            <a:off x="7100000" y="4180000"/>
+            <a:ext cx="4100000" cy="2306000"/>
+          </a:xfrm>
+          <a:prstGeom prst="rect">
+            <a:avLst/>
+          </a:prstGeom>
+        </p:spPr>
+      </p:pic>
+      <p:sp>
+        <p:nvSpPr>
+          <p:cNvPr id="9" name="Cap9"/>
+          <p:cNvSpPr txBox="1"/>
+          <p:nvPr/>
+        </p:nvSpPr>
+        <p:spPr>
+          <a:xfrm>
+            <a:off x="1500000" y="6500000"/>
+            <a:ext cx="5000000" cy="330000"/>
+          </a:xfrm>
+          <a:prstGeom prst="rect">
+            <a:avLst/>
+          </a:prstGeom>
+        </p:spPr>
+        <p:txBody>
+          <a:bodyPr wrap="square" anchor="t">
+            <a:normAutofit/>
+          </a:bodyPr>
+          <a:lstStyle/>
+          <a:p>
+            <a:pPr algn="ctr"/>
+            <a:r>
+              <a:rPr lang="en-US" sz="1400" b="1" dirty="0">
+                <a:latin typeface="Arial"/>
+                <a:cs typeface="Arial"/>
+              </a:rPr>
+              <a:t>Same interface — English</a:t>
+            </a:r>
+          </a:p>
+        </p:txBody>
+      </p:sp>
+      <p:sp>
+        <p:nvSpPr>
+          <p:cNvPr id="10" name="Cap10"/>
+          <p:cNvSpPr txBox="1"/>
+          <p:nvPr/>
+        </p:nvSpPr>
+        <p:spPr>
+          <a:xfrm>
+            <a:off x="7000000" y="6500000"/>
+            <a:ext cx="5000000" cy="330000"/>
+          </a:xfrm>
+          <a:prstGeom prst="rect">
+            <a:avLst/>
+          </a:prstGeom>
+        </p:spPr>
+        <p:txBody>
+          <a:bodyPr wrap="square" anchor="t">
+            <a:normAutofit/>
+          </a:bodyPr>
+          <a:lstStyle/>
+          <a:p>
+            <a:pPr algn="ctr"/>
+            <a:r>
+              <a:rPr lang="en-US" sz="1400" b="1" dirty="0">
+                <a:latin typeface="Arial"/>
+                <a:cs typeface="Arial"/>
+              </a:rPr>
+              <a:t>Same interface — हिन्दी</a:t>
+            </a:r>
           </a:p>
         </p:txBody>
       </p:sp>

--- a/docs/presentation/finalppt.pptx
+++ b/docs/presentation/finalppt.pptx
@@ -6845,30 +6845,6 @@
       </p:sp>
       <p:pic>
         <p:nvPicPr>
-          <p:cNvPr id="7" name="Screenshot English"/>
-          <p:cNvPicPr>
-            <a:picLocks noChangeAspect="1"/>
-          </p:cNvPicPr>
-          <p:nvPr/>
-        </p:nvPicPr>
-        <p:blipFill rotWithShape="1">
-          <a:blip r:embed="rId2"/>
-          <a:stretch>
-            <a:fillRect/>
-          </a:stretch>
-        </p:blipFill>
-        <p:spPr>
-          <a:xfrm>
-            <a:off x="1600000" y="4180000"/>
-            <a:ext cx="4100000" cy="2306000"/>
-          </a:xfrm>
-          <a:prstGeom prst="rect">
-            <a:avLst/>
-          </a:prstGeom>
-        </p:spPr>
-      </p:pic>
-      <p:pic>
-        <p:nvPicPr>
           <p:cNvPr id="8" name="Screenshot Hindi"/>
           <p:cNvPicPr>
             <a:picLocks noChangeAspect="1"/>
@@ -6883,8 +6859,8 @@
         </p:blipFill>
         <p:spPr>
           <a:xfrm>
-            <a:off x="7100000" y="4180000"/>
-            <a:ext cx="4100000" cy="2306000"/>
+            <a:off x="4112616" y="4133088"/>
+            <a:ext cx="3966464" cy="2231136"/>
           </a:xfrm>
           <a:prstGeom prst="rect">
             <a:avLst/>
@@ -6893,14 +6869,14 @@
       </p:pic>
       <p:sp>
         <p:nvSpPr>
-          <p:cNvPr id="9" name="Cap9"/>
+          <p:cNvPr id="10" name="Cap10"/>
           <p:cNvSpPr txBox="1"/>
           <p:nvPr/>
         </p:nvSpPr>
         <p:spPr>
           <a:xfrm>
-            <a:off x="1500000" y="6500000"/>
-            <a:ext cx="5000000" cy="330000"/>
+            <a:off x="2712568" y="6446520"/>
+            <a:ext cx="6766560" cy="310896"/>
           </a:xfrm>
           <a:prstGeom prst="rect">
             <a:avLst/>
@@ -6918,39 +6894,7 @@
                 <a:latin typeface="Arial"/>
                 <a:cs typeface="Arial"/>
               </a:rPr>
-              <a:t>Same interface — English</a:t>
-            </a:r>
-          </a:p>
-        </p:txBody>
-      </p:sp>
-      <p:sp>
-        <p:nvSpPr>
-          <p:cNvPr id="10" name="Cap10"/>
-          <p:cNvSpPr txBox="1"/>
-          <p:nvPr/>
-        </p:nvSpPr>
-        <p:spPr>
-          <a:xfrm>
-            <a:off x="7000000" y="6500000"/>
-            <a:ext cx="5000000" cy="330000"/>
-          </a:xfrm>
-          <a:prstGeom prst="rect">
-            <a:avLst/>
-          </a:prstGeom>
-        </p:spPr>
-        <p:txBody>
-          <a:bodyPr wrap="square" anchor="t">
-            <a:normAutofit/>
-          </a:bodyPr>
-          <a:lstStyle/>
-          <a:p>
-            <a:pPr algn="ctr"/>
-            <a:r>
-              <a:rPr lang="en-US" sz="1400" b="1" dirty="0">
-                <a:latin typeface="Arial"/>
-                <a:cs typeface="Arial"/>
-              </a:rPr>
-              <a:t>Same interface — हिन्दी</a:t>
+              <a:t>Drona dashboard in हिन्दी — same tool, no separate build</a:t>
             </a:r>
           </a:p>
         </p:txBody>
